--- a/dist/초3/국어/발표와쓰기/초3_국어_발표와쓰기_02_문단쓰기_학생용.pptx
+++ b/dist/초3/국어/발표와쓰기/초3_국어_발표와쓰기_02_문단쓰기_학생용.pptx
@@ -118,38 +118,38 @@
   <p:extLst>
     <p:ext uri="{521415D9-36F7-43E2-AB2F-B90AF26B5E84}">
       <p14:sectionLst xmlns:p14="http://schemas.microsoft.com/office/powerpoint/2010/main">
-        <p14:section name="도입" id="{6e394cac-12d7-a1dd-235d-c7e9f1772bb8}">
+        <p14:section name="도입" id="{acab66b1-cc43-494d-ae42-36b0d1c79712}">
           <p14:sldIdLst>
             <p14:sldId id="256"/>
             <p14:sldId id="257"/>
           </p14:sldIdLst>
         </p14:section>
-        <p14:section name="개념" id="{7e14e0ce-24c1-9c95-c386-5f90a17a339a}">
+        <p14:section name="개념" id="{cac31879-42bf-7373-3bcb-213fd79211c2}">
           <p14:sldIdLst>
             <p14:sldId id="258"/>
             <p14:sldId id="259"/>
             <p14:sldId id="260"/>
           </p14:sldIdLst>
         </p14:section>
-        <p14:section name="연습" id="{8f41ac35-3e1f-30e3-6886-2882f88c437c}">
+        <p14:section name="연습" id="{50c93af7-e191-5bfa-4135-13ee5b8e9036}">
           <p14:sldIdLst>
             <p14:sldId id="261"/>
             <p14:sldId id="262"/>
             <p14:sldId id="263"/>
           </p14:sldIdLst>
         </p14:section>
-        <p14:section name="확인" id="{45aab6c5-f6be-f83b-83f4-00eaba6192c8}">
+        <p14:section name="확인" id="{37ba8a42-44de-19ee-efb0-59303dffe280}">
           <p14:sldIdLst>
             <p14:sldId id="264"/>
             <p14:sldId id="265"/>
           </p14:sldIdLst>
         </p14:section>
-        <p14:section name="정리" id="{341f6d34-c9df-3062-292e-4e5fb49799e3}">
+        <p14:section name="정리" id="{fd38ea4f-5484-2bbe-a378-17c2d8bd0baf}">
           <p14:sldIdLst>
             <p14:sldId id="266"/>
           </p14:sldIdLst>
         </p14:section>
-        <p14:section name="보충" id="{b66a68e7-ab6f-c0d0-0cce-0e02bbb762e6}">
+        <p14:section name="보충" id="{923dcf0f-6624-8f03-4a6b-873d55939944}">
           <p14:sldIdLst>
             <p14:sldId id="267"/>
           </p14:sldIdLst>
@@ -2605,7 +2605,7 @@
           <a:bodyPr wrap="square" lIns="0" tIns="0" rIns="0" bIns="0" rtlCol="0" anchor="ctr"/>
           <a:lstStyle/>
           <a:p>
-            <a:pPr algn="l" indent="0" marL="0">
+            <a:pPr eaLnBrk="0" algn="l" indent="0" marL="0">
               <a:buNone/>
             </a:pPr>
             <a:r>
@@ -2646,7 +2646,7 @@
           <a:bodyPr wrap="square" lIns="0" tIns="0" rIns="0" bIns="0" rtlCol="0" anchor="t"/>
           <a:lstStyle/>
           <a:p>
-            <a:pPr indent="0" marL="0">
+            <a:pPr eaLnBrk="0" indent="0" marL="0">
               <a:buNone/>
             </a:pPr>
             <a:r>
@@ -2663,7 +2663,7 @@
             <a:endParaRPr lang="ko-KR" sz="3000" dirty="0"/>
           </a:p>
           <a:p>
-            <a:pPr indent="0" marL="0">
+            <a:pPr eaLnBrk="0" indent="0" marL="0">
               <a:buNone/>
             </a:pPr>
             <a:r>
@@ -2729,7 +2729,7 @@
           <a:bodyPr wrap="square" lIns="0" tIns="0" rIns="0" bIns="0" rtlCol="0" anchor="ctr"/>
           <a:lstStyle/>
           <a:p>
-            <a:pPr indent="0" marL="0">
+            <a:pPr eaLnBrk="0" indent="0" marL="0">
               <a:spcAft>
                 <a:spcPts val="600"/>
               </a:spcAft>
@@ -2749,7 +2749,7 @@
             <a:endParaRPr lang="ko-KR" sz="3000" dirty="0"/>
           </a:p>
           <a:p>
-            <a:pPr indent="0" marL="0">
+            <a:pPr eaLnBrk="0" indent="0" marL="0">
               <a:spcAft>
                 <a:spcPts val="600"/>
               </a:spcAft>
@@ -2769,7 +2769,7 @@
             <a:endParaRPr lang="ko-KR" sz="3000" dirty="0"/>
           </a:p>
           <a:p>
-            <a:pPr indent="0" marL="0">
+            <a:pPr eaLnBrk="0" indent="0" marL="0">
               <a:spcAft>
                 <a:spcPts val="600"/>
               </a:spcAft>
@@ -2838,7 +2838,7 @@
           <a:bodyPr wrap="square" lIns="0" tIns="0" rIns="0" bIns="0" rtlCol="0" anchor="ctr"/>
           <a:lstStyle/>
           <a:p>
-            <a:pPr algn="l" indent="0" marL="0">
+            <a:pPr eaLnBrk="0" algn="l" indent="0" marL="0">
               <a:buNone/>
             </a:pPr>
             <a:r>
@@ -2877,7 +2877,7 @@
           <a:bodyPr wrap="square" lIns="0" tIns="0" rIns="0" bIns="0" rtlCol="0" anchor="ctr"/>
           <a:lstStyle/>
           <a:p>
-            <a:pPr algn="l" indent="0" marL="0">
+            <a:pPr eaLnBrk="0" algn="l" indent="0" marL="0">
               <a:buNone/>
             </a:pPr>
             <a:r>
@@ -2943,7 +2943,7 @@
           <a:bodyPr wrap="square" lIns="0" tIns="0" rIns="0" bIns="0" rtlCol="0" anchor="ctr"/>
           <a:lstStyle/>
           <a:p>
-            <a:pPr indent="0" marL="0">
+            <a:pPr eaLnBrk="0" indent="0" marL="0">
               <a:spcAft>
                 <a:spcPts val="600"/>
               </a:spcAft>
@@ -2993,7 +2993,7 @@
           <a:bodyPr wrap="square" lIns="0" tIns="0" rIns="0" bIns="0" rtlCol="0" anchor="ctr"/>
           <a:lstStyle/>
           <a:p>
-            <a:pPr algn="ctr" indent="0" marL="0">
+            <a:pPr eaLnBrk="0" algn="ctr" indent="0" marL="0">
               <a:buNone/>
             </a:pPr>
             <a:r>
@@ -3059,7 +3059,7 @@
           <a:bodyPr wrap="square" lIns="0" tIns="0" rIns="0" bIns="0" rtlCol="0" anchor="ctr"/>
           <a:lstStyle/>
           <a:p>
-            <a:pPr indent="0" marL="0">
+            <a:pPr eaLnBrk="0" indent="0" marL="0">
               <a:spcAft>
                 <a:spcPts val="600"/>
               </a:spcAft>
@@ -3079,7 +3079,7 @@
             <a:endParaRPr lang="ko-KR" sz="3000" dirty="0"/>
           </a:p>
           <a:p>
-            <a:pPr indent="0" marL="0">
+            <a:pPr eaLnBrk="0" indent="0" marL="0">
               <a:spcAft>
                 <a:spcPts val="600"/>
               </a:spcAft>
@@ -3129,7 +3129,7 @@
           <a:bodyPr wrap="square" lIns="0" tIns="0" rIns="0" bIns="0" rtlCol="0" anchor="ctr"/>
           <a:lstStyle/>
           <a:p>
-            <a:pPr algn="ctr" indent="0" marL="0">
+            <a:pPr eaLnBrk="0" algn="ctr" indent="0" marL="0">
               <a:buNone/>
             </a:pPr>
             <a:r>
@@ -3195,7 +3195,7 @@
           <a:bodyPr wrap="square" lIns="0" tIns="0" rIns="0" bIns="0" rtlCol="0" anchor="ctr"/>
           <a:lstStyle/>
           <a:p>
-            <a:pPr indent="0" marL="0">
+            <a:pPr eaLnBrk="0" indent="0" marL="0">
               <a:spcAft>
                 <a:spcPts val="600"/>
               </a:spcAft>
@@ -3215,7 +3215,7 @@
             <a:endParaRPr lang="ko-KR" sz="3000" dirty="0"/>
           </a:p>
           <a:p>
-            <a:pPr indent="0" marL="0">
+            <a:pPr eaLnBrk="0" indent="0" marL="0">
               <a:spcAft>
                 <a:spcPts val="600"/>
               </a:spcAft>
@@ -3265,7 +3265,7 @@
           <a:bodyPr wrap="square" lIns="0" tIns="0" rIns="0" bIns="0" rtlCol="0" anchor="ctr"/>
           <a:lstStyle/>
           <a:p>
-            <a:pPr algn="ctr" indent="0" marL="0">
+            <a:pPr eaLnBrk="0" algn="ctr" indent="0" marL="0">
               <a:buNone/>
             </a:pPr>
             <a:r>
@@ -3331,7 +3331,7 @@
           <a:bodyPr wrap="square" lIns="0" tIns="0" rIns="0" bIns="0" rtlCol="0" anchor="ctr"/>
           <a:lstStyle/>
           <a:p>
-            <a:pPr indent="0" marL="0">
+            <a:pPr eaLnBrk="0" indent="0" marL="0">
               <a:spcAft>
                 <a:spcPts val="600"/>
               </a:spcAft>
@@ -3351,7 +3351,7 @@
             <a:endParaRPr lang="ko-KR" sz="3000" dirty="0"/>
           </a:p>
           <a:p>
-            <a:pPr indent="0" marL="0">
+            <a:pPr eaLnBrk="0" indent="0" marL="0">
               <a:spcAft>
                 <a:spcPts val="600"/>
               </a:spcAft>
@@ -3411,7 +3411,7 @@
             </a:lvl1pPr>
           </a:lstStyle>
           <a:p>
-            <a:pPr algn="r"/>
+            <a:pPr eaLnBrk="0" algn="r"/>
             <a:fld id="{F7021451-1387-4CA6-816F-3879F97B5CBC}" type="slidenum">
               <a:rPr b="0" lang="en-US"/>
               <a:t>10</a:t>
@@ -3468,7 +3468,7 @@
           <a:bodyPr wrap="square" lIns="0" tIns="0" rIns="0" bIns="0" rtlCol="0" anchor="ctr"/>
           <a:lstStyle/>
           <a:p>
-            <a:pPr algn="l" indent="0" marL="0">
+            <a:pPr eaLnBrk="0" algn="l" indent="0" marL="0">
               <a:buNone/>
             </a:pPr>
             <a:r>
@@ -3534,7 +3534,7 @@
           <a:bodyPr wrap="square" lIns="0" tIns="0" rIns="0" bIns="0" rtlCol="0" anchor="ctr"/>
           <a:lstStyle/>
           <a:p>
-            <a:pPr indent="0" marL="0">
+            <a:pPr eaLnBrk="0" indent="0" marL="0">
               <a:spcAft>
                 <a:spcPts val="600"/>
               </a:spcAft>
@@ -3554,7 +3554,7 @@
             <a:endParaRPr lang="ko-KR" sz="3000" dirty="0"/>
           </a:p>
           <a:p>
-            <a:pPr indent="0" marL="0">
+            <a:pPr eaLnBrk="0" indent="0" marL="0">
               <a:spcAft>
                 <a:spcPts val="600"/>
               </a:spcAft>
@@ -3604,7 +3604,7 @@
           <a:bodyPr wrap="square" lIns="177800" tIns="0" rIns="177800" bIns="0" rtlCol="0" anchor="ctr"/>
           <a:lstStyle/>
           <a:p>
-            <a:pPr algn="l" indent="0" marL="0">
+            <a:pPr eaLnBrk="0" algn="l" indent="0" marL="0">
               <a:buNone/>
             </a:pPr>
             <a:r>
@@ -3651,7 +3651,7 @@
           <a:bodyPr wrap="square" lIns="177800" tIns="0" rIns="177800" bIns="0" rtlCol="0" anchor="ctr"/>
           <a:lstStyle/>
           <a:p>
-            <a:pPr algn="l" indent="0" marL="0">
+            <a:pPr eaLnBrk="0" algn="l" indent="0" marL="0">
               <a:buNone/>
             </a:pPr>
             <a:r>
@@ -3690,7 +3690,7 @@
           <a:bodyPr wrap="square" lIns="0" tIns="0" rIns="0" bIns="0" rtlCol="0" anchor="t"/>
           <a:lstStyle/>
           <a:p>
-            <a:pPr algn="l" indent="0" marL="0">
+            <a:pPr eaLnBrk="0" algn="l" indent="0" marL="0">
               <a:buNone/>
             </a:pPr>
             <a:r>
@@ -3729,7 +3729,7 @@
           <a:bodyPr wrap="square" lIns="0" tIns="0" rIns="0" bIns="0" rtlCol="0" anchor="ctr"/>
           <a:lstStyle/>
           <a:p>
-            <a:pPr algn="l" indent="0" marL="0">
+            <a:pPr eaLnBrk="0" algn="l" indent="0" marL="0">
               <a:buNone/>
             </a:pPr>
             <a:r>
@@ -3768,7 +3768,7 @@
           <a:bodyPr wrap="square" lIns="0" tIns="0" rIns="0" bIns="0" rtlCol="0" anchor="ctr"/>
           <a:lstStyle/>
           <a:p>
-            <a:pPr algn="l" indent="0" marL="0">
+            <a:pPr eaLnBrk="0" algn="l" indent="0" marL="0">
               <a:buNone/>
             </a:pPr>
             <a:r>
@@ -3807,7 +3807,7 @@
           <a:bodyPr wrap="square" lIns="0" tIns="0" rIns="0" bIns="0" rtlCol="0" anchor="ctr"/>
           <a:lstStyle/>
           <a:p>
-            <a:pPr algn="l" indent="0" marL="0">
+            <a:pPr eaLnBrk="0" algn="l" indent="0" marL="0">
               <a:buNone/>
             </a:pPr>
             <a:r>
@@ -3846,7 +3846,7 @@
           <a:bodyPr wrap="square" lIns="0" tIns="0" rIns="0" bIns="0" rtlCol="0" anchor="ctr"/>
           <a:lstStyle/>
           <a:p>
-            <a:pPr algn="l" indent="0" marL="0">
+            <a:pPr eaLnBrk="0" algn="l" indent="0" marL="0">
               <a:buNone/>
             </a:pPr>
             <a:r>
@@ -3903,7 +3903,7 @@
             </a:lvl1pPr>
           </a:lstStyle>
           <a:p>
-            <a:pPr algn="r"/>
+            <a:pPr eaLnBrk="0" algn="r"/>
             <a:fld id="{F7021451-1387-4CA6-816F-3879F97B5CBC}" type="slidenum">
               <a:rPr b="0" lang="en-US"/>
               <a:t>11</a:t>
@@ -3960,7 +3960,7 @@
           <a:bodyPr wrap="square" lIns="0" tIns="0" rIns="0" bIns="0" rtlCol="0" anchor="ctr"/>
           <a:lstStyle/>
           <a:p>
-            <a:pPr algn="l" indent="0" marL="0">
+            <a:pPr eaLnBrk="0" algn="l" indent="0" marL="0">
               <a:buNone/>
             </a:pPr>
             <a:r>
@@ -3999,7 +3999,7 @@
           <a:bodyPr wrap="square" lIns="0" tIns="0" rIns="0" bIns="0" rtlCol="0" anchor="ctr"/>
           <a:lstStyle/>
           <a:p>
-            <a:pPr algn="l" indent="0" marL="0">
+            <a:pPr eaLnBrk="0" algn="l" indent="0" marL="0">
               <a:buNone/>
             </a:pPr>
             <a:r>
@@ -4065,7 +4065,7 @@
           <a:bodyPr wrap="square" lIns="0" tIns="0" rIns="0" bIns="0" rtlCol="0" anchor="ctr"/>
           <a:lstStyle/>
           <a:p>
-            <a:pPr indent="0" marL="0">
+            <a:pPr eaLnBrk="0" indent="0" marL="0">
               <a:spcAft>
                 <a:spcPts val="600"/>
               </a:spcAft>
@@ -4134,7 +4134,7 @@
           <a:bodyPr wrap="square" lIns="0" tIns="0" rIns="0" bIns="0" rtlCol="0" anchor="ctr"/>
           <a:lstStyle/>
           <a:p>
-            <a:pPr indent="0" marL="0">
+            <a:pPr eaLnBrk="0" indent="0" marL="0">
               <a:spcAft>
                 <a:spcPts val="600"/>
               </a:spcAft>
@@ -4154,7 +4154,7 @@
             <a:endParaRPr lang="ko-KR" sz="3000" dirty="0"/>
           </a:p>
           <a:p>
-            <a:pPr indent="0" marL="0">
+            <a:pPr eaLnBrk="0" indent="0" marL="0">
               <a:spcAft>
                 <a:spcPts val="600"/>
               </a:spcAft>
@@ -4223,7 +4223,7 @@
           <a:bodyPr wrap="square" lIns="0" tIns="0" rIns="0" bIns="0" rtlCol="0" anchor="ctr"/>
           <a:lstStyle/>
           <a:p>
-            <a:pPr indent="0" marL="0">
+            <a:pPr eaLnBrk="0" indent="0" marL="0">
               <a:spcAft>
                 <a:spcPts val="600"/>
               </a:spcAft>
@@ -4243,7 +4243,7 @@
             <a:endParaRPr lang="ko-KR" sz="3000" dirty="0"/>
           </a:p>
           <a:p>
-            <a:pPr indent="0" marL="0">
+            <a:pPr eaLnBrk="0" indent="0" marL="0">
               <a:spcAft>
                 <a:spcPts val="600"/>
               </a:spcAft>
@@ -4312,7 +4312,7 @@
           <a:bodyPr wrap="square" lIns="0" tIns="0" rIns="0" bIns="0" rtlCol="0" anchor="ctr"/>
           <a:lstStyle/>
           <a:p>
-            <a:pPr indent="0" marL="0">
+            <a:pPr eaLnBrk="0" indent="0" marL="0">
               <a:spcAft>
                 <a:spcPts val="600"/>
               </a:spcAft>
@@ -4332,7 +4332,7 @@
             <a:endParaRPr lang="ko-KR" sz="3000" dirty="0"/>
           </a:p>
           <a:p>
-            <a:pPr indent="0" marL="0">
+            <a:pPr eaLnBrk="0" indent="0" marL="0">
               <a:spcAft>
                 <a:spcPts val="600"/>
               </a:spcAft>
@@ -4392,7 +4392,7 @@
             </a:lvl1pPr>
           </a:lstStyle>
           <a:p>
-            <a:pPr algn="r"/>
+            <a:pPr eaLnBrk="0" algn="r"/>
             <a:fld id="{F7021451-1387-4CA6-816F-3879F97B5CBC}" type="slidenum">
               <a:rPr b="0" lang="en-US"/>
               <a:t>12</a:t>
@@ -4449,7 +4449,7 @@
           <a:bodyPr wrap="square" lIns="0" tIns="0" rIns="0" bIns="0" rtlCol="0" anchor="ctr"/>
           <a:lstStyle/>
           <a:p>
-            <a:pPr algn="l" indent="0" marL="0">
+            <a:pPr eaLnBrk="0" algn="l" indent="0" marL="0">
               <a:buNone/>
             </a:pPr>
             <a:r>
@@ -4515,7 +4515,7 @@
           <a:bodyPr wrap="square" lIns="0" tIns="0" rIns="0" bIns="0" rtlCol="0" anchor="ctr"/>
           <a:lstStyle/>
           <a:p>
-            <a:pPr indent="0" marL="0">
+            <a:pPr eaLnBrk="0" indent="0" marL="0">
               <a:spcAft>
                 <a:spcPts val="600"/>
               </a:spcAft>
@@ -4584,7 +4584,7 @@
           <a:bodyPr wrap="square" lIns="0" tIns="0" rIns="0" bIns="0" rtlCol="0" anchor="t"/>
           <a:lstStyle/>
           <a:p>
-            <a:pPr indent="0" marL="0">
+            <a:pPr eaLnBrk="0" algn="l" indent="0" marL="0">
               <a:lnSpc>
                 <a:spcPct val="105000"/>
               </a:lnSpc>
@@ -4647,7 +4647,7 @@
             </a:lvl1pPr>
           </a:lstStyle>
           <a:p>
-            <a:pPr algn="r"/>
+            <a:pPr eaLnBrk="0" algn="r"/>
             <a:fld id="{F7021451-1387-4CA6-816F-3879F97B5CBC}" type="slidenum">
               <a:rPr b="0" lang="en-US"/>
               <a:t>2</a:t>
@@ -4704,7 +4704,7 @@
           <a:bodyPr wrap="square" lIns="0" tIns="0" rIns="0" bIns="0" rtlCol="0" anchor="ctr"/>
           <a:lstStyle/>
           <a:p>
-            <a:pPr algn="l" indent="0" marL="0">
+            <a:pPr eaLnBrk="0" algn="l" indent="0" marL="0">
               <a:buNone/>
             </a:pPr>
             <a:r>
@@ -4770,7 +4770,7 @@
           <a:bodyPr wrap="square" lIns="0" tIns="0" rIns="0" bIns="0" rtlCol="0" anchor="ctr"/>
           <a:lstStyle/>
           <a:p>
-            <a:pPr indent="0" marL="0">
+            <a:pPr eaLnBrk="0" indent="0" marL="0">
               <a:spcAft>
                 <a:spcPts val="600"/>
               </a:spcAft>
@@ -4839,7 +4839,7 @@
           <a:bodyPr wrap="square" lIns="0" tIns="0" rIns="0" bIns="0" rtlCol="0" anchor="ctr"/>
           <a:lstStyle/>
           <a:p>
-            <a:pPr indent="0" marL="0">
+            <a:pPr eaLnBrk="0" indent="0" marL="0">
               <a:spcAft>
                 <a:spcPts val="600"/>
               </a:spcAft>
@@ -4859,7 +4859,7 @@
             <a:endParaRPr lang="ko-KR" sz="3000" dirty="0"/>
           </a:p>
           <a:p>
-            <a:pPr indent="0" marL="0">
+            <a:pPr eaLnBrk="0" indent="0" marL="0">
               <a:spcAft>
                 <a:spcPts val="600"/>
               </a:spcAft>
@@ -4928,7 +4928,7 @@
           <a:bodyPr wrap="square" lIns="0" tIns="0" rIns="0" bIns="0" rtlCol="0" anchor="ctr"/>
           <a:lstStyle/>
           <a:p>
-            <a:pPr indent="0" marL="0">
+            <a:pPr eaLnBrk="0" indent="0" marL="0">
               <a:spcAft>
                 <a:spcPts val="600"/>
               </a:spcAft>
@@ -4948,7 +4948,7 @@
             <a:endParaRPr lang="ko-KR" sz="3000" dirty="0"/>
           </a:p>
           <a:p>
-            <a:pPr indent="0" marL="0">
+            <a:pPr eaLnBrk="0" indent="0" marL="0">
               <a:spcAft>
                 <a:spcPts val="600"/>
               </a:spcAft>
@@ -4968,7 +4968,7 @@
             <a:endParaRPr lang="ko-KR" sz="3000" dirty="0"/>
           </a:p>
           <a:p>
-            <a:pPr indent="0" marL="0">
+            <a:pPr eaLnBrk="0" indent="0" marL="0">
               <a:spcAft>
                 <a:spcPts val="600"/>
               </a:spcAft>
@@ -5037,7 +5037,7 @@
           <a:bodyPr wrap="square" lIns="0" tIns="0" rIns="0" bIns="0" rtlCol="0" anchor="ctr"/>
           <a:lstStyle/>
           <a:p>
-            <a:pPr indent="0" marL="0">
+            <a:pPr eaLnBrk="0" indent="0" marL="0">
               <a:spcAft>
                 <a:spcPts val="600"/>
               </a:spcAft>
@@ -5057,7 +5057,7 @@
             <a:endParaRPr lang="ko-KR" sz="3000" dirty="0"/>
           </a:p>
           <a:p>
-            <a:pPr indent="0" marL="0">
+            <a:pPr eaLnBrk="0" indent="0" marL="0">
               <a:spcAft>
                 <a:spcPts val="600"/>
               </a:spcAft>
@@ -5117,7 +5117,7 @@
             </a:lvl1pPr>
           </a:lstStyle>
           <a:p>
-            <a:pPr algn="r"/>
+            <a:pPr eaLnBrk="0" algn="r"/>
             <a:fld id="{F7021451-1387-4CA6-816F-3879F97B5CBC}" type="slidenum">
               <a:rPr b="0" lang="en-US"/>
               <a:t>3</a:t>
@@ -5174,7 +5174,7 @@
           <a:bodyPr wrap="square" lIns="0" tIns="0" rIns="0" bIns="0" rtlCol="0" anchor="ctr"/>
           <a:lstStyle/>
           <a:p>
-            <a:pPr algn="l" indent="0" marL="0">
+            <a:pPr eaLnBrk="0" algn="l" indent="0" marL="0">
               <a:buNone/>
             </a:pPr>
             <a:r>
@@ -5219,7 +5219,7 @@
           <a:bodyPr wrap="square" lIns="0" tIns="0" rIns="0" bIns="0" rtlCol="0" anchor="ctr"/>
           <a:lstStyle/>
           <a:p>
-            <a:pPr algn="ctr" indent="0" marL="0">
+            <a:pPr eaLnBrk="0" algn="ctr" indent="0" marL="0">
               <a:buNone/>
             </a:pPr>
             <a:r>
@@ -5258,7 +5258,7 @@
           <a:bodyPr wrap="square" lIns="0" tIns="0" rIns="0" bIns="0" rtlCol="0" anchor="t"/>
           <a:lstStyle/>
           <a:p>
-            <a:pPr algn="l" indent="0" marL="0">
+            <a:pPr eaLnBrk="0" algn="l" indent="0" marL="0">
               <a:buNone/>
             </a:pPr>
             <a:r>
@@ -5303,7 +5303,7 @@
           <a:bodyPr wrap="square" lIns="0" tIns="0" rIns="0" bIns="0" rtlCol="0" anchor="ctr"/>
           <a:lstStyle/>
           <a:p>
-            <a:pPr algn="ctr" indent="0" marL="0">
+            <a:pPr eaLnBrk="0" algn="ctr" indent="0" marL="0">
               <a:buNone/>
             </a:pPr>
             <a:r>
@@ -5342,7 +5342,7 @@
           <a:bodyPr wrap="square" lIns="0" tIns="0" rIns="0" bIns="0" rtlCol="0" anchor="t"/>
           <a:lstStyle/>
           <a:p>
-            <a:pPr algn="l" indent="0" marL="0">
+            <a:pPr eaLnBrk="0" algn="l" indent="0" marL="0">
               <a:buNone/>
             </a:pPr>
             <a:r>
@@ -5387,7 +5387,7 @@
           <a:bodyPr wrap="square" lIns="0" tIns="0" rIns="0" bIns="0" rtlCol="0" anchor="ctr"/>
           <a:lstStyle/>
           <a:p>
-            <a:pPr algn="ctr" indent="0" marL="0">
+            <a:pPr eaLnBrk="0" algn="ctr" indent="0" marL="0">
               <a:buNone/>
             </a:pPr>
             <a:r>
@@ -5426,7 +5426,7 @@
           <a:bodyPr wrap="square" lIns="0" tIns="0" rIns="0" bIns="0" rtlCol="0" anchor="t"/>
           <a:lstStyle/>
           <a:p>
-            <a:pPr algn="l" indent="0" marL="0">
+            <a:pPr eaLnBrk="0" algn="l" indent="0" marL="0">
               <a:buNone/>
             </a:pPr>
             <a:r>
@@ -5471,7 +5471,7 @@
           <a:bodyPr wrap="square" lIns="0" tIns="0" rIns="0" bIns="0" rtlCol="0" anchor="ctr"/>
           <a:lstStyle/>
           <a:p>
-            <a:pPr algn="ctr" indent="0" marL="0">
+            <a:pPr eaLnBrk="0" algn="ctr" indent="0" marL="0">
               <a:buNone/>
             </a:pPr>
             <a:r>
@@ -5510,7 +5510,7 @@
           <a:bodyPr wrap="square" lIns="0" tIns="0" rIns="0" bIns="0" rtlCol="0" anchor="t"/>
           <a:lstStyle/>
           <a:p>
-            <a:pPr algn="l" indent="0" marL="0">
+            <a:pPr eaLnBrk="0" algn="l" indent="0" marL="0">
               <a:buNone/>
             </a:pPr>
             <a:r>
@@ -5555,7 +5555,7 @@
           <a:bodyPr wrap="square" lIns="0" tIns="0" rIns="0" bIns="0" rtlCol="0" anchor="ctr"/>
           <a:lstStyle/>
           <a:p>
-            <a:pPr algn="ctr" indent="0" marL="0">
+            <a:pPr eaLnBrk="0" algn="ctr" indent="0" marL="0">
               <a:buNone/>
             </a:pPr>
             <a:r>
@@ -5594,7 +5594,7 @@
           <a:bodyPr wrap="square" lIns="0" tIns="0" rIns="0" bIns="0" rtlCol="0" anchor="t"/>
           <a:lstStyle/>
           <a:p>
-            <a:pPr algn="l" indent="0" marL="0">
+            <a:pPr eaLnBrk="0" algn="l" indent="0" marL="0">
               <a:buNone/>
             </a:pPr>
             <a:r>
@@ -5651,7 +5651,7 @@
             </a:lvl1pPr>
           </a:lstStyle>
           <a:p>
-            <a:pPr algn="r"/>
+            <a:pPr eaLnBrk="0" algn="r"/>
             <a:fld id="{F7021451-1387-4CA6-816F-3879F97B5CBC}" type="slidenum">
               <a:rPr b="0" lang="en-US"/>
               <a:t>4</a:t>
@@ -5708,7 +5708,7 @@
           <a:bodyPr wrap="square" lIns="0" tIns="0" rIns="0" bIns="0" rtlCol="0" anchor="ctr"/>
           <a:lstStyle/>
           <a:p>
-            <a:pPr algn="l" indent="0" marL="0">
+            <a:pPr eaLnBrk="0" algn="l" indent="0" marL="0">
               <a:buNone/>
             </a:pPr>
             <a:r>
@@ -5774,7 +5774,7 @@
           <a:bodyPr wrap="square" lIns="0" tIns="0" rIns="0" bIns="0" rtlCol="0" anchor="ctr"/>
           <a:lstStyle/>
           <a:p>
-            <a:pPr indent="0" marL="0">
+            <a:pPr eaLnBrk="0" indent="0" marL="0">
               <a:spcAft>
                 <a:spcPts val="600"/>
               </a:spcAft>
@@ -5843,7 +5843,7 @@
           <a:bodyPr wrap="square" lIns="0" tIns="0" rIns="0" bIns="0" rtlCol="0" anchor="t"/>
           <a:lstStyle/>
           <a:p>
-            <a:pPr indent="0" marL="0">
+            <a:pPr eaLnBrk="0" algn="l" indent="0" marL="0">
               <a:lnSpc>
                 <a:spcPct val="105000"/>
               </a:lnSpc>
@@ -5906,7 +5906,7 @@
             </a:lvl1pPr>
           </a:lstStyle>
           <a:p>
-            <a:pPr algn="r"/>
+            <a:pPr eaLnBrk="0" algn="r"/>
             <a:fld id="{F7021451-1387-4CA6-816F-3879F97B5CBC}" type="slidenum">
               <a:rPr b="0" lang="en-US"/>
               <a:t>5</a:t>
@@ -5963,7 +5963,7 @@
           <a:bodyPr wrap="square" lIns="0" tIns="0" rIns="0" bIns="0" rtlCol="0" anchor="ctr"/>
           <a:lstStyle/>
           <a:p>
-            <a:pPr algn="l" indent="0" marL="0">
+            <a:pPr eaLnBrk="0" algn="l" indent="0" marL="0">
               <a:buNone/>
             </a:pPr>
             <a:r>
@@ -6029,7 +6029,7 @@
           <a:bodyPr wrap="square" lIns="0" tIns="0" rIns="0" bIns="0" rtlCol="0" anchor="ctr"/>
           <a:lstStyle/>
           <a:p>
-            <a:pPr indent="0" marL="0">
+            <a:pPr eaLnBrk="0" indent="0" marL="0">
               <a:spcAft>
                 <a:spcPts val="600"/>
               </a:spcAft>
@@ -6098,7 +6098,7 @@
           <a:bodyPr wrap="square" lIns="0" tIns="0" rIns="0" bIns="0" rtlCol="0" anchor="t"/>
           <a:lstStyle/>
           <a:p>
-            <a:pPr indent="0" marL="0">
+            <a:pPr eaLnBrk="0" algn="l" indent="0" marL="0">
               <a:lnSpc>
                 <a:spcPct val="105000"/>
               </a:lnSpc>
@@ -6161,7 +6161,7 @@
             </a:lvl1pPr>
           </a:lstStyle>
           <a:p>
-            <a:pPr algn="r"/>
+            <a:pPr eaLnBrk="0" algn="r"/>
             <a:fld id="{F7021451-1387-4CA6-816F-3879F97B5CBC}" type="slidenum">
               <a:rPr b="0" lang="en-US"/>
               <a:t>6</a:t>
@@ -6218,7 +6218,7 @@
           <a:bodyPr wrap="square" lIns="0" tIns="0" rIns="0" bIns="0" rtlCol="0" anchor="ctr"/>
           <a:lstStyle/>
           <a:p>
-            <a:pPr algn="l" indent="0" marL="0">
+            <a:pPr eaLnBrk="0" algn="l" indent="0" marL="0">
               <a:buNone/>
             </a:pPr>
             <a:r>
@@ -6284,7 +6284,7 @@
           <a:bodyPr wrap="square" lIns="0" tIns="0" rIns="0" bIns="0" rtlCol="0" anchor="ctr"/>
           <a:lstStyle/>
           <a:p>
-            <a:pPr indent="0" marL="0">
+            <a:pPr eaLnBrk="0" indent="0" marL="0">
               <a:spcAft>
                 <a:spcPts val="600"/>
               </a:spcAft>
@@ -6353,7 +6353,7 @@
           <a:bodyPr wrap="square" lIns="0" tIns="0" rIns="0" bIns="0" rtlCol="0" anchor="ctr"/>
           <a:lstStyle/>
           <a:p>
-            <a:pPr indent="0" marL="0">
+            <a:pPr eaLnBrk="0" indent="0" marL="0">
               <a:spcAft>
                 <a:spcPts val="600"/>
               </a:spcAft>
@@ -6403,7 +6403,7 @@
           <a:bodyPr wrap="square" lIns="177800" tIns="0" rIns="177800" bIns="0" rtlCol="0" anchor="ctr"/>
           <a:lstStyle/>
           <a:p>
-            <a:pPr algn="l" indent="0" marL="0">
+            <a:pPr eaLnBrk="0" algn="l" indent="0" marL="0">
               <a:buNone/>
             </a:pPr>
             <a:r>
@@ -6442,7 +6442,7 @@
           <a:bodyPr wrap="square" lIns="0" tIns="0" rIns="0" bIns="0" rtlCol="0" anchor="t"/>
           <a:lstStyle/>
           <a:p>
-            <a:pPr algn="l" indent="0" marL="0">
+            <a:pPr eaLnBrk="0" algn="l" indent="0" marL="0">
               <a:buNone/>
             </a:pPr>
             <a:r>
@@ -6489,7 +6489,7 @@
           <a:bodyPr wrap="square" lIns="177800" tIns="0" rIns="177800" bIns="0" rtlCol="0" anchor="ctr"/>
           <a:lstStyle/>
           <a:p>
-            <a:pPr algn="l" indent="0" marL="0">
+            <a:pPr eaLnBrk="0" algn="l" indent="0" marL="0">
               <a:buNone/>
             </a:pPr>
             <a:r>
@@ -6528,7 +6528,7 @@
           <a:bodyPr wrap="square" lIns="0" tIns="0" rIns="0" bIns="0" rtlCol="0" anchor="t"/>
           <a:lstStyle/>
           <a:p>
-            <a:pPr algn="l" indent="0" marL="0">
+            <a:pPr eaLnBrk="0" algn="l" indent="0" marL="0">
               <a:buNone/>
             </a:pPr>
             <a:r>
@@ -6545,7 +6545,7 @@
             <a:endParaRPr lang="ko-KR" sz="3000" dirty="0"/>
           </a:p>
           <a:p>
-            <a:pPr algn="l" indent="0" marL="0">
+            <a:pPr eaLnBrk="0" algn="l" indent="0" marL="0">
               <a:buNone/>
             </a:pPr>
             <a:r>
@@ -6562,7 +6562,7 @@
             <a:endParaRPr lang="ko-KR" sz="3000" dirty="0"/>
           </a:p>
           <a:p>
-            <a:pPr algn="l" indent="0" marL="0">
+            <a:pPr eaLnBrk="0" algn="l" indent="0" marL="0">
               <a:buNone/>
             </a:pPr>
             <a:r>
@@ -6619,7 +6619,7 @@
             </a:lvl1pPr>
           </a:lstStyle>
           <a:p>
-            <a:pPr algn="r"/>
+            <a:pPr eaLnBrk="0" algn="r"/>
             <a:fld id="{F7021451-1387-4CA6-816F-3879F97B5CBC}" type="slidenum">
               <a:rPr b="0" lang="en-US"/>
               <a:t>7</a:t>
@@ -6676,7 +6676,7 @@
           <a:bodyPr wrap="square" lIns="0" tIns="0" rIns="0" bIns="0" rtlCol="0" anchor="ctr"/>
           <a:lstStyle/>
           <a:p>
-            <a:pPr algn="l" indent="0" marL="0">
+            <a:pPr eaLnBrk="0" algn="l" indent="0" marL="0">
               <a:buNone/>
             </a:pPr>
             <a:r>
@@ -6715,7 +6715,7 @@
           <a:bodyPr wrap="square" lIns="0" tIns="0" rIns="0" bIns="0" rtlCol="0" anchor="ctr"/>
           <a:lstStyle/>
           <a:p>
-            <a:pPr algn="l" indent="0" marL="0">
+            <a:pPr eaLnBrk="0" algn="l" indent="0" marL="0">
               <a:buNone/>
             </a:pPr>
             <a:r>
@@ -6781,7 +6781,7 @@
           <a:bodyPr wrap="square" lIns="0" tIns="0" rIns="0" bIns="0" rtlCol="0" anchor="ctr"/>
           <a:lstStyle/>
           <a:p>
-            <a:pPr indent="0" marL="0">
+            <a:pPr eaLnBrk="0" indent="0" marL="0">
               <a:spcAft>
                 <a:spcPts val="600"/>
               </a:spcAft>
@@ -6831,7 +6831,7 @@
           <a:bodyPr wrap="square" lIns="0" tIns="0" rIns="0" bIns="0" rtlCol="0" anchor="ctr"/>
           <a:lstStyle/>
           <a:p>
-            <a:pPr algn="ctr" indent="0" marL="0">
+            <a:pPr eaLnBrk="0" algn="ctr" indent="0" marL="0">
               <a:buNone/>
             </a:pPr>
             <a:r>
@@ -6870,7 +6870,7 @@
           <a:bodyPr wrap="square" lIns="0" tIns="0" rIns="0" bIns="0" rtlCol="0" anchor="ctr"/>
           <a:lstStyle/>
           <a:p>
-            <a:pPr algn="l" indent="0" marL="0">
+            <a:pPr eaLnBrk="0" algn="l" indent="0" marL="0">
               <a:buNone/>
             </a:pPr>
             <a:r>
@@ -6917,7 +6917,7 @@
           <a:bodyPr wrap="square" lIns="0" tIns="0" rIns="0" bIns="0" rtlCol="0" anchor="ctr"/>
           <a:lstStyle/>
           <a:p>
-            <a:pPr algn="ctr" indent="0" marL="0">
+            <a:pPr eaLnBrk="0" algn="ctr" indent="0" marL="0">
               <a:buNone/>
             </a:pPr>
             <a:r>
@@ -6956,7 +6956,7 @@
           <a:bodyPr wrap="square" lIns="0" tIns="0" rIns="0" bIns="0" rtlCol="0" anchor="ctr"/>
           <a:lstStyle/>
           <a:p>
-            <a:pPr algn="l" indent="0" marL="0">
+            <a:pPr eaLnBrk="0" algn="l" indent="0" marL="0">
               <a:buNone/>
             </a:pPr>
             <a:r>
@@ -7013,7 +7013,7 @@
             </a:lvl1pPr>
           </a:lstStyle>
           <a:p>
-            <a:pPr algn="r"/>
+            <a:pPr eaLnBrk="0" algn="r"/>
             <a:fld id="{F7021451-1387-4CA6-816F-3879F97B5CBC}" type="slidenum">
               <a:rPr b="0" lang="en-US"/>
               <a:t>8</a:t>
@@ -7070,7 +7070,7 @@
           <a:bodyPr wrap="square" lIns="0" tIns="0" rIns="0" bIns="0" rtlCol="0" anchor="ctr"/>
           <a:lstStyle/>
           <a:p>
-            <a:pPr algn="l" indent="0" marL="0">
+            <a:pPr eaLnBrk="0" algn="l" indent="0" marL="0">
               <a:buNone/>
             </a:pPr>
             <a:r>
@@ -7109,7 +7109,7 @@
           <a:bodyPr wrap="square" lIns="0" tIns="0" rIns="0" bIns="0" rtlCol="0" anchor="ctr"/>
           <a:lstStyle/>
           <a:p>
-            <a:pPr algn="l" indent="0" marL="0">
+            <a:pPr eaLnBrk="0" algn="l" indent="0" marL="0">
               <a:buNone/>
             </a:pPr>
             <a:r>
@@ -7175,7 +7175,7 @@
           <a:bodyPr wrap="square" lIns="0" tIns="0" rIns="0" bIns="0" rtlCol="0" anchor="ctr"/>
           <a:lstStyle/>
           <a:p>
-            <a:pPr indent="0" marL="0">
+            <a:pPr eaLnBrk="0" indent="0" marL="0">
               <a:spcAft>
                 <a:spcPts val="600"/>
               </a:spcAft>
@@ -7195,7 +7195,7 @@
             <a:endParaRPr lang="ko-KR" sz="3000" dirty="0"/>
           </a:p>
           <a:p>
-            <a:pPr indent="0" marL="0">
+            <a:pPr eaLnBrk="0" indent="0" marL="0">
               <a:spcAft>
                 <a:spcPts val="600"/>
               </a:spcAft>
@@ -7215,7 +7215,7 @@
             <a:endParaRPr lang="ko-KR" sz="3000" dirty="0"/>
           </a:p>
           <a:p>
-            <a:pPr indent="0" marL="0">
+            <a:pPr eaLnBrk="0" indent="0" marL="0">
               <a:spcAft>
                 <a:spcPts val="600"/>
               </a:spcAft>
@@ -7235,7 +7235,7 @@
             <a:endParaRPr lang="ko-KR" sz="3000" dirty="0"/>
           </a:p>
           <a:p>
-            <a:pPr indent="0" marL="0">
+            <a:pPr eaLnBrk="0" indent="0" marL="0">
               <a:spcAft>
                 <a:spcPts val="600"/>
               </a:spcAft>
@@ -7255,7 +7255,7 @@
             <a:endParaRPr lang="ko-KR" sz="3000" dirty="0"/>
           </a:p>
           <a:p>
-            <a:pPr indent="0" marL="0">
+            <a:pPr eaLnBrk="0" indent="0" marL="0">
               <a:spcAft>
                 <a:spcPts val="600"/>
               </a:spcAft>
@@ -7303,7 +7303,7 @@
           <a:bodyPr wrap="square" lIns="0" tIns="0" rIns="0" bIns="0" rtlCol="0" anchor="ctr"/>
           <a:lstStyle/>
           <a:p>
-            <a:pPr algn="ctr" indent="0" marL="0">
+            <a:pPr eaLnBrk="0" algn="ctr" indent="0" marL="0">
               <a:buNone/>
             </a:pPr>
             <a:r>
@@ -7342,7 +7342,7 @@
           <a:bodyPr wrap="square" lIns="0" tIns="0" rIns="0" bIns="0" rtlCol="0" anchor="t"/>
           <a:lstStyle/>
           <a:p>
-            <a:pPr algn="l" indent="0" marL="0">
+            <a:pPr eaLnBrk="0" algn="l" indent="0" marL="0">
               <a:buNone/>
             </a:pPr>
             <a:r>
@@ -7387,7 +7387,7 @@
           <a:bodyPr wrap="square" lIns="0" tIns="0" rIns="0" bIns="0" rtlCol="0" anchor="ctr"/>
           <a:lstStyle/>
           <a:p>
-            <a:pPr algn="ctr" indent="0" marL="0">
+            <a:pPr eaLnBrk="0" algn="ctr" indent="0" marL="0">
               <a:buNone/>
             </a:pPr>
             <a:r>
@@ -7426,7 +7426,7 @@
           <a:bodyPr wrap="square" lIns="0" tIns="0" rIns="0" bIns="0" rtlCol="0" anchor="t"/>
           <a:lstStyle/>
           <a:p>
-            <a:pPr algn="l" indent="0" marL="0">
+            <a:pPr eaLnBrk="0" algn="l" indent="0" marL="0">
               <a:buNone/>
             </a:pPr>
             <a:r>
@@ -7471,7 +7471,7 @@
           <a:bodyPr wrap="square" lIns="0" tIns="0" rIns="0" bIns="0" rtlCol="0" anchor="ctr"/>
           <a:lstStyle/>
           <a:p>
-            <a:pPr algn="ctr" indent="0" marL="0">
+            <a:pPr eaLnBrk="0" algn="ctr" indent="0" marL="0">
               <a:buNone/>
             </a:pPr>
             <a:r>
@@ -7510,7 +7510,7 @@
           <a:bodyPr wrap="square" lIns="0" tIns="0" rIns="0" bIns="0" rtlCol="0" anchor="t"/>
           <a:lstStyle/>
           <a:p>
-            <a:pPr algn="l" indent="0" marL="0">
+            <a:pPr eaLnBrk="0" algn="l" indent="0" marL="0">
               <a:buNone/>
             </a:pPr>
             <a:r>
@@ -7555,7 +7555,7 @@
           <a:bodyPr wrap="square" lIns="0" tIns="0" rIns="0" bIns="0" rtlCol="0" anchor="ctr"/>
           <a:lstStyle/>
           <a:p>
-            <a:pPr algn="ctr" indent="0" marL="0">
+            <a:pPr eaLnBrk="0" algn="ctr" indent="0" marL="0">
               <a:buNone/>
             </a:pPr>
             <a:r>
@@ -7594,7 +7594,7 @@
           <a:bodyPr wrap="square" lIns="0" tIns="0" rIns="0" bIns="0" rtlCol="0" anchor="t"/>
           <a:lstStyle/>
           <a:p>
-            <a:pPr algn="l" indent="0" marL="0">
+            <a:pPr eaLnBrk="0" algn="l" indent="0" marL="0">
               <a:buNone/>
             </a:pPr>
             <a:r>
@@ -7651,7 +7651,7 @@
             </a:lvl1pPr>
           </a:lstStyle>
           <a:p>
-            <a:pPr algn="r"/>
+            <a:pPr eaLnBrk="0" algn="r"/>
             <a:fld id="{F7021451-1387-4CA6-816F-3879F97B5CBC}" type="slidenum">
               <a:rPr b="0" lang="en-US"/>
               <a:t>9</a:t>

--- a/dist/초3/국어/발표와쓰기/초3_국어_발표와쓰기_02_문단쓰기_학생용.pptx
+++ b/dist/초3/국어/발표와쓰기/초3_국어_발표와쓰기_02_문단쓰기_학생용.pptx
@@ -118,38 +118,38 @@
   <p:extLst>
     <p:ext uri="{521415D9-36F7-43E2-AB2F-B90AF26B5E84}">
       <p14:sectionLst xmlns:p14="http://schemas.microsoft.com/office/powerpoint/2010/main">
-        <p14:section name="도입" id="{acab66b1-cc43-494d-ae42-36b0d1c79712}">
+        <p14:section name="도입" id="{211bb5db-71f6-33b0-9b31-f229e440aee5}">
           <p14:sldIdLst>
             <p14:sldId id="256"/>
             <p14:sldId id="257"/>
           </p14:sldIdLst>
         </p14:section>
-        <p14:section name="개념" id="{cac31879-42bf-7373-3bcb-213fd79211c2}">
+        <p14:section name="개념" id="{aae4d235-a454-2c56-ce93-6f53b84d1949}">
           <p14:sldIdLst>
             <p14:sldId id="258"/>
             <p14:sldId id="259"/>
             <p14:sldId id="260"/>
           </p14:sldIdLst>
         </p14:section>
-        <p14:section name="연습" id="{50c93af7-e191-5bfa-4135-13ee5b8e9036}">
+        <p14:section name="연습" id="{78998f31-9aea-2d79-3c51-ba3475f6f287}">
           <p14:sldIdLst>
             <p14:sldId id="261"/>
             <p14:sldId id="262"/>
             <p14:sldId id="263"/>
           </p14:sldIdLst>
         </p14:section>
-        <p14:section name="확인" id="{37ba8a42-44de-19ee-efb0-59303dffe280}">
+        <p14:section name="확인" id="{689ecdc8-2372-e7a8-e156-f2947341cd4a}">
           <p14:sldIdLst>
             <p14:sldId id="264"/>
             <p14:sldId id="265"/>
           </p14:sldIdLst>
         </p14:section>
-        <p14:section name="정리" id="{fd38ea4f-5484-2bbe-a378-17c2d8bd0baf}">
+        <p14:section name="정리" id="{e7892fbf-f037-2793-1ee8-8db0cf1ec2f1}">
           <p14:sldIdLst>
             <p14:sldId id="266"/>
           </p14:sldIdLst>
         </p14:section>
-        <p14:section name="보충" id="{923dcf0f-6624-8f03-4a6b-873d55939944}">
+        <p14:section name="보충" id="{95935d06-e9a7-555c-89ca-76f0069682d1}">
           <p14:sldIdLst>
             <p14:sldId id="267"/>
           </p14:sldIdLst>
